--- a/# Exercise GMSG 3/Exercice 4 Giovanni.pptx
+++ b/# Exercise GMSG 3/Exercice 4 Giovanni.pptx
@@ -112,7 +112,8 @@
 <file path=ppt/revisionInfo.xml><?xml version="1.0" encoding="utf-8"?>
 <p1510:revInfo xmlns:a="http://schemas.openxmlformats.org/drawingml/2006/main" xmlns:r="http://schemas.openxmlformats.org/officeDocument/2006/relationships" xmlns:p1510="http://schemas.microsoft.com/office/powerpoint/2015/10/main">
   <p1510:revLst>
-    <p1510:client id="{23FFBEE1-EF35-462A-A5ED-0F6B2809A1A6}" v="28" dt="2026-03-28T16:26:57.534"/>
+    <p1510:client id="{63B84AAC-A33B-33AD-87DB-92BE579B2AB7}" v="13" dt="2026-03-31T05:41:22.869"/>
+    <p1510:client id="{B8883208-C25B-9397-75E7-765BC38F4F38}" v="5" dt="2026-03-31T06:43:03.101"/>
   </p1510:revLst>
 </p1510:revInfo>
 </file>
@@ -132,30 +133,6 @@
           <pc:docMk/>
           <pc:sldMk cId="2405184198" sldId="257"/>
         </pc:sldMkLst>
-        <pc:spChg chg="add del">
-          <ac:chgData name="Natalia dfouni" userId="11246a259a7f76ca" providerId="LiveId" clId="{5A2EEA3B-EDDB-4F85-9183-AF5FA427644B}" dt="2026-03-28T09:17:48.681" v="173" actId="478"/>
-          <ac:spMkLst>
-            <pc:docMk/>
-            <pc:sldMk cId="2405184198" sldId="257"/>
-            <ac:spMk id="2" creationId="{0812D773-0143-6A7E-9C60-BE8570AC644E}"/>
-          </ac:spMkLst>
-        </pc:spChg>
-        <pc:spChg chg="add del">
-          <ac:chgData name="Natalia dfouni" userId="11246a259a7f76ca" providerId="LiveId" clId="{5A2EEA3B-EDDB-4F85-9183-AF5FA427644B}" dt="2026-03-28T09:18:12.683" v="176" actId="478"/>
-          <ac:spMkLst>
-            <pc:docMk/>
-            <pc:sldMk cId="2405184198" sldId="257"/>
-            <ac:spMk id="4" creationId="{3DB8A5ED-968E-6C67-C297-304196234227}"/>
-          </ac:spMkLst>
-        </pc:spChg>
-        <pc:spChg chg="add del">
-          <ac:chgData name="Natalia dfouni" userId="11246a259a7f76ca" providerId="LiveId" clId="{5A2EEA3B-EDDB-4F85-9183-AF5FA427644B}" dt="2026-03-28T09:18:30.572" v="178" actId="478"/>
-          <ac:spMkLst>
-            <pc:docMk/>
-            <pc:sldMk cId="2405184198" sldId="257"/>
-            <ac:spMk id="5" creationId="{B94F47EC-46EE-8B89-48E3-0432BA6F207F}"/>
-          </ac:spMkLst>
-        </pc:spChg>
         <pc:spChg chg="add">
           <ac:chgData name="Natalia dfouni" userId="11246a259a7f76ca" providerId="LiveId" clId="{5A2EEA3B-EDDB-4F85-9183-AF5FA427644B}" dt="2026-03-28T09:18:51.657" v="179" actId="11529"/>
           <ac:spMkLst>
@@ -172,22 +149,6 @@
             <ac:spMk id="39" creationId="{3C33226A-25B5-A6E8-AB9A-12F0FD9C0155}"/>
           </ac:spMkLst>
         </pc:spChg>
-        <pc:spChg chg="add del">
-          <ac:chgData name="Natalia dfouni" userId="11246a259a7f76ca" providerId="LiveId" clId="{5A2EEA3B-EDDB-4F85-9183-AF5FA427644B}" dt="2026-03-27T19:20:10.745" v="1" actId="478"/>
-          <ac:spMkLst>
-            <pc:docMk/>
-            <pc:sldMk cId="2405184198" sldId="257"/>
-            <ac:spMk id="46" creationId="{9AAF1F86-B458-E527-D2BA-DA8FE45A5F93}"/>
-          </ac:spMkLst>
-        </pc:spChg>
-        <pc:spChg chg="add del">
-          <ac:chgData name="Natalia dfouni" userId="11246a259a7f76ca" providerId="LiveId" clId="{5A2EEA3B-EDDB-4F85-9183-AF5FA427644B}" dt="2026-03-27T19:22:42.077" v="3" actId="478"/>
-          <ac:spMkLst>
-            <pc:docMk/>
-            <pc:sldMk cId="2405184198" sldId="257"/>
-            <ac:spMk id="47" creationId="{5DEAFBBB-099E-4C55-DD20-09D0A2167AC4}"/>
-          </ac:spMkLst>
-        </pc:spChg>
         <pc:spChg chg="add mod">
           <ac:chgData name="Natalia dfouni" userId="11246a259a7f76ca" providerId="LiveId" clId="{5A2EEA3B-EDDB-4F85-9183-AF5FA427644B}" dt="2026-03-27T19:38:12.558" v="151" actId="1076"/>
           <ac:spMkLst>
@@ -202,14 +163,6 @@
             <pc:docMk/>
             <pc:sldMk cId="2405184198" sldId="257"/>
             <ac:spMk id="59" creationId="{46A5888E-4C90-12F5-A83F-75674C8A2FB0}"/>
-          </ac:spMkLst>
-        </pc:spChg>
-        <pc:spChg chg="add mod">
-          <ac:chgData name="Natalia dfouni" userId="11246a259a7f76ca" providerId="LiveId" clId="{5A2EEA3B-EDDB-4F85-9183-AF5FA427644B}" dt="2026-03-27T19:32:01.989" v="57" actId="1076"/>
-          <ac:spMkLst>
-            <pc:docMk/>
-            <pc:sldMk cId="2405184198" sldId="257"/>
-            <ac:spMk id="60" creationId="{475F1231-F1CE-4527-8977-53877B13F49D}"/>
           </ac:spMkLst>
         </pc:spChg>
         <pc:spChg chg="add mod">
@@ -268,14 +221,6 @@
             <ac:picMk id="3" creationId="{D838700C-8117-2244-4625-56C6B55BA687}"/>
           </ac:picMkLst>
         </pc:picChg>
-        <pc:cxnChg chg="add del">
-          <ac:chgData name="Natalia dfouni" userId="11246a259a7f76ca" providerId="LiveId" clId="{5A2EEA3B-EDDB-4F85-9183-AF5FA427644B}" dt="2026-03-27T19:24:13.463" v="5" actId="478"/>
-          <ac:cxnSpMkLst>
-            <pc:docMk/>
-            <pc:sldMk cId="2405184198" sldId="257"/>
-            <ac:cxnSpMk id="49" creationId="{4F8AA959-5271-1D66-5478-01398456C6BD}"/>
-          </ac:cxnSpMkLst>
-        </pc:cxnChg>
         <pc:cxnChg chg="add mod">
           <ac:chgData name="Natalia dfouni" userId="11246a259a7f76ca" providerId="LiveId" clId="{5A2EEA3B-EDDB-4F85-9183-AF5FA427644B}" dt="2026-03-27T19:38:06.413" v="150" actId="1076"/>
           <ac:cxnSpMkLst>
@@ -333,14 +278,6 @@
           </ac:cxnSpMkLst>
         </pc:cxnChg>
         <pc:cxnChg chg="add mod">
-          <ac:chgData name="Natalia dfouni" userId="11246a259a7f76ca" providerId="LiveId" clId="{5A2EEA3B-EDDB-4F85-9183-AF5FA427644B}" dt="2026-03-27T19:37:45.445" v="141" actId="1076"/>
-          <ac:cxnSpMkLst>
-            <pc:docMk/>
-            <pc:sldMk cId="2405184198" sldId="257"/>
-            <ac:cxnSpMk id="76" creationId="{F796EF5E-C760-06AE-8C8C-B4D384ECBD39}"/>
-          </ac:cxnSpMkLst>
-        </pc:cxnChg>
-        <pc:cxnChg chg="add mod">
           <ac:chgData name="Natalia dfouni" userId="11246a259a7f76ca" providerId="LiveId" clId="{5A2EEA3B-EDDB-4F85-9183-AF5FA427644B}" dt="2026-03-28T16:26:52.948" v="187" actId="692"/>
           <ac:cxnSpMkLst>
             <pc:docMk/>
@@ -348,6 +285,70 @@
             <ac:cxnSpMk id="77" creationId="{DD43AF3D-7862-A483-BBBD-06548A4B9A54}"/>
           </ac:cxnSpMkLst>
         </pc:cxnChg>
+      </pc:sldChg>
+    </pc:docChg>
+  </pc:docChgLst>
+  <pc:docChgLst>
+    <pc:chgData name="Guest User" providerId="Windows Live" clId="Web-{63B84AAC-A33B-33AD-87DB-92BE579B2AB7}"/>
+    <pc:docChg chg="modSld">
+      <pc:chgData name="Guest User" userId="" providerId="Windows Live" clId="Web-{63B84AAC-A33B-33AD-87DB-92BE579B2AB7}" dt="2026-03-31T05:41:20.510" v="8" actId="20577"/>
+      <pc:docMkLst>
+        <pc:docMk/>
+      </pc:docMkLst>
+      <pc:sldChg chg="modSp">
+        <pc:chgData name="Guest User" userId="" providerId="Windows Live" clId="Web-{63B84AAC-A33B-33AD-87DB-92BE579B2AB7}" dt="2026-03-31T05:41:20.510" v="8" actId="20577"/>
+        <pc:sldMkLst>
+          <pc:docMk/>
+          <pc:sldMk cId="2405184198" sldId="257"/>
+        </pc:sldMkLst>
+        <pc:spChg chg="mod">
+          <ac:chgData name="Guest User" userId="" providerId="Windows Live" clId="Web-{63B84AAC-A33B-33AD-87DB-92BE579B2AB7}" dt="2026-03-31T05:41:13.229" v="6" actId="1076"/>
+          <ac:spMkLst>
+            <pc:docMk/>
+            <pc:sldMk cId="2405184198" sldId="257"/>
+            <ac:spMk id="62" creationId="{50D3C9DA-1439-56BA-3E10-2CBDADC031D4}"/>
+          </ac:spMkLst>
+        </pc:spChg>
+        <pc:spChg chg="mod">
+          <ac:chgData name="Guest User" userId="" providerId="Windows Live" clId="Web-{63B84AAC-A33B-33AD-87DB-92BE579B2AB7}" dt="2026-03-31T05:41:20.510" v="8" actId="20577"/>
+          <ac:spMkLst>
+            <pc:docMk/>
+            <pc:sldMk cId="2405184198" sldId="257"/>
+            <ac:spMk id="85" creationId="{16C9FDA1-E0C1-1079-7151-5D489C25C6FB}"/>
+          </ac:spMkLst>
+        </pc:spChg>
+      </pc:sldChg>
+    </pc:docChg>
+  </pc:docChgLst>
+  <pc:docChgLst>
+    <pc:chgData name="Guest User" providerId="Windows Live" clId="Web-{B8883208-C25B-9397-75E7-765BC38F4F38}"/>
+    <pc:docChg chg="modSld">
+      <pc:chgData name="Guest User" userId="" providerId="Windows Live" clId="Web-{B8883208-C25B-9397-75E7-765BC38F4F38}" dt="2026-03-31T06:43:03.101" v="3" actId="14100"/>
+      <pc:docMkLst>
+        <pc:docMk/>
+      </pc:docMkLst>
+      <pc:sldChg chg="addSp modSp">
+        <pc:chgData name="Guest User" userId="" providerId="Windows Live" clId="Web-{B8883208-C25B-9397-75E7-765BC38F4F38}" dt="2026-03-31T06:43:03.101" v="3" actId="14100"/>
+        <pc:sldMkLst>
+          <pc:docMk/>
+          <pc:sldMk cId="1785254320" sldId="256"/>
+        </pc:sldMkLst>
+        <pc:spChg chg="add mod">
+          <ac:chgData name="Guest User" userId="" providerId="Windows Live" clId="Web-{B8883208-C25B-9397-75E7-765BC38F4F38}" dt="2026-03-31T06:43:03.101" v="3" actId="14100"/>
+          <ac:spMkLst>
+            <pc:docMk/>
+            <pc:sldMk cId="1785254320" sldId="256"/>
+            <ac:spMk id="5" creationId="{8117D9A2-63BB-ADBF-1BDC-B6DB7A2CFEA0}"/>
+          </ac:spMkLst>
+        </pc:spChg>
+        <pc:picChg chg="add mod">
+          <ac:chgData name="Guest User" userId="" providerId="Windows Live" clId="Web-{B8883208-C25B-9397-75E7-765BC38F4F38}" dt="2026-03-31T06:42:14.349" v="0"/>
+          <ac:picMkLst>
+            <pc:docMk/>
+            <pc:sldMk cId="1785254320" sldId="256"/>
+            <ac:picMk id="4" creationId="{B3B13740-B9D8-6F8C-556B-CE54428654AD}"/>
+          </ac:picMkLst>
+        </pc:picChg>
       </pc:sldChg>
     </pc:docChg>
   </pc:docChgLst>
@@ -503,7 +504,7 @@
           <a:p>
             <a:fld id="{CC5CB896-DE72-4D00-AC07-0963A03159E5}" type="datetimeFigureOut">
               <a:rPr lang="fr-CH" smtClean="0"/>
-              <a:t>28.03.2026</a:t>
+              <a:t>30.03.2026</a:t>
             </a:fld>
             <a:endParaRPr lang="fr-CH"/>
           </a:p>
@@ -703,7 +704,7 @@
           <a:p>
             <a:fld id="{CC5CB896-DE72-4D00-AC07-0963A03159E5}" type="datetimeFigureOut">
               <a:rPr lang="fr-CH" smtClean="0"/>
-              <a:t>28.03.2026</a:t>
+              <a:t>30.03.2026</a:t>
             </a:fld>
             <a:endParaRPr lang="fr-CH"/>
           </a:p>
@@ -913,7 +914,7 @@
           <a:p>
             <a:fld id="{CC5CB896-DE72-4D00-AC07-0963A03159E5}" type="datetimeFigureOut">
               <a:rPr lang="fr-CH" smtClean="0"/>
-              <a:t>28.03.2026</a:t>
+              <a:t>30.03.2026</a:t>
             </a:fld>
             <a:endParaRPr lang="fr-CH"/>
           </a:p>
@@ -1113,7 +1114,7 @@
           <a:p>
             <a:fld id="{CC5CB896-DE72-4D00-AC07-0963A03159E5}" type="datetimeFigureOut">
               <a:rPr lang="fr-CH" smtClean="0"/>
-              <a:t>28.03.2026</a:t>
+              <a:t>30.03.2026</a:t>
             </a:fld>
             <a:endParaRPr lang="fr-CH"/>
           </a:p>
@@ -1389,7 +1390,7 @@
           <a:p>
             <a:fld id="{CC5CB896-DE72-4D00-AC07-0963A03159E5}" type="datetimeFigureOut">
               <a:rPr lang="fr-CH" smtClean="0"/>
-              <a:t>28.03.2026</a:t>
+              <a:t>30.03.2026</a:t>
             </a:fld>
             <a:endParaRPr lang="fr-CH"/>
           </a:p>
@@ -1657,7 +1658,7 @@
           <a:p>
             <a:fld id="{CC5CB896-DE72-4D00-AC07-0963A03159E5}" type="datetimeFigureOut">
               <a:rPr lang="fr-CH" smtClean="0"/>
-              <a:t>28.03.2026</a:t>
+              <a:t>30.03.2026</a:t>
             </a:fld>
             <a:endParaRPr lang="fr-CH"/>
           </a:p>
@@ -2072,7 +2073,7 @@
           <a:p>
             <a:fld id="{CC5CB896-DE72-4D00-AC07-0963A03159E5}" type="datetimeFigureOut">
               <a:rPr lang="fr-CH" smtClean="0"/>
-              <a:t>28.03.2026</a:t>
+              <a:t>30.03.2026</a:t>
             </a:fld>
             <a:endParaRPr lang="fr-CH"/>
           </a:p>
@@ -2214,7 +2215,7 @@
           <a:p>
             <a:fld id="{CC5CB896-DE72-4D00-AC07-0963A03159E5}" type="datetimeFigureOut">
               <a:rPr lang="fr-CH" smtClean="0"/>
-              <a:t>28.03.2026</a:t>
+              <a:t>30.03.2026</a:t>
             </a:fld>
             <a:endParaRPr lang="fr-CH"/>
           </a:p>
@@ -2327,7 +2328,7 @@
           <a:p>
             <a:fld id="{CC5CB896-DE72-4D00-AC07-0963A03159E5}" type="datetimeFigureOut">
               <a:rPr lang="fr-CH" smtClean="0"/>
-              <a:t>28.03.2026</a:t>
+              <a:t>30.03.2026</a:t>
             </a:fld>
             <a:endParaRPr lang="fr-CH"/>
           </a:p>
@@ -2640,7 +2641,7 @@
           <a:p>
             <a:fld id="{CC5CB896-DE72-4D00-AC07-0963A03159E5}" type="datetimeFigureOut">
               <a:rPr lang="fr-CH" smtClean="0"/>
-              <a:t>28.03.2026</a:t>
+              <a:t>30.03.2026</a:t>
             </a:fld>
             <a:endParaRPr lang="fr-CH"/>
           </a:p>
@@ -2929,7 +2930,7 @@
           <a:p>
             <a:fld id="{CC5CB896-DE72-4D00-AC07-0963A03159E5}" type="datetimeFigureOut">
               <a:rPr lang="fr-CH" smtClean="0"/>
-              <a:t>28.03.2026</a:t>
+              <a:t>30.03.2026</a:t>
             </a:fld>
             <a:endParaRPr lang="fr-CH"/>
           </a:p>
@@ -3172,7 +3173,7 @@
           <a:p>
             <a:fld id="{CC5CB896-DE72-4D00-AC07-0963A03159E5}" type="datetimeFigureOut">
               <a:rPr lang="fr-CH" smtClean="0"/>
-              <a:t>28.03.2026</a:t>
+              <a:t>30.03.2026</a:t>
             </a:fld>
             <a:endParaRPr lang="fr-CH"/>
           </a:p>
@@ -3639,6 +3640,74 @@
           </a:p>
         </p:txBody>
       </p:sp>
+      <p:pic>
+        <p:nvPicPr>
+          <p:cNvPr id="4" name="Picture 3" descr="A close-up of a cliff&#10;&#10;AI-generated content may be incorrect.">
+            <a:extLst>
+              <a:ext uri="{FF2B5EF4-FFF2-40B4-BE49-F238E27FC236}">
+                <a16:creationId xmlns:a16="http://schemas.microsoft.com/office/drawing/2014/main" id="{B3B13740-B9D8-6F8C-556B-CE54428654AD}"/>
+              </a:ext>
+            </a:extLst>
+          </p:cNvPr>
+          <p:cNvPicPr>
+            <a:picLocks noChangeAspect="1"/>
+          </p:cNvPicPr>
+          <p:nvPr/>
+        </p:nvPicPr>
+        <p:blipFill>
+          <a:blip r:embed="rId2"/>
+          <a:stretch>
+            <a:fillRect/>
+          </a:stretch>
+        </p:blipFill>
+        <p:spPr>
+          <a:xfrm>
+            <a:off x="0" y="0"/>
+            <a:ext cx="12192000" cy="6858000"/>
+          </a:xfrm>
+          <a:prstGeom prst="rect">
+            <a:avLst/>
+          </a:prstGeom>
+        </p:spPr>
+      </p:pic>
+      <p:sp>
+        <p:nvSpPr>
+          <p:cNvPr id="5" name="TextBox 4">
+            <a:extLst>
+              <a:ext uri="{FF2B5EF4-FFF2-40B4-BE49-F238E27FC236}">
+                <a16:creationId xmlns:a16="http://schemas.microsoft.com/office/drawing/2014/main" id="{8117D9A2-63BB-ADBF-1BDC-B6DB7A2CFEA0}"/>
+              </a:ext>
+            </a:extLst>
+          </p:cNvPr>
+          <p:cNvSpPr txBox="1"/>
+          <p:nvPr/>
+        </p:nvSpPr>
+        <p:spPr>
+          <a:xfrm>
+            <a:off x="6088260" y="142240"/>
+            <a:ext cx="5788779" cy="637177"/>
+          </a:xfrm>
+          <a:prstGeom prst="rect">
+            <a:avLst/>
+          </a:prstGeom>
+          <a:solidFill>
+            <a:schemeClr val="bg1"/>
+          </a:solidFill>
+        </p:spPr>
+        <p:txBody>
+          <a:bodyPr rot="0" spcFirstLastPara="0" vertOverflow="overflow" horzOverflow="overflow" vert="horz" wrap="square" lIns="91440" tIns="45720" rIns="91440" bIns="45720" numCol="1" spcCol="0" rtlCol="0" fromWordArt="0" anchor="t" anchorCtr="0" forceAA="0" compatLnSpc="1">
+            <a:prstTxWarp prst="textNoShape">
+              <a:avLst/>
+            </a:prstTxWarp>
+            <a:spAutoFit/>
+          </a:bodyPr>
+          <a:lstStyle/>
+          <a:p>
+            <a:pPr algn="l"/>
+            <a:endParaRPr lang="en-US"/>
+          </a:p>
+        </p:txBody>
+      </p:sp>
     </p:spTree>
     <p:extLst>
       <p:ext uri="{BB962C8B-B14F-4D97-AF65-F5344CB8AC3E}">
@@ -5894,8 +5963,8 @@
         </p:nvSpPr>
         <p:spPr>
           <a:xfrm rot="1212817">
-            <a:off x="5056039" y="2819234"/>
-            <a:ext cx="1012843" cy="338554"/>
+            <a:off x="4150666" y="3882992"/>
+            <a:ext cx="1167624" cy="338554"/>
           </a:xfrm>
           <a:prstGeom prst="rect">
             <a:avLst/>
@@ -5903,16 +5972,20 @@
           <a:noFill/>
         </p:spPr>
         <p:txBody>
-          <a:bodyPr wrap="square" rtlCol="0">
+          <a:bodyPr wrap="square" lIns="91440" tIns="45720" rIns="91440" bIns="45720" rtlCol="0" anchor="t">
             <a:spAutoFit/>
           </a:bodyPr>
           <a:lstStyle/>
           <a:p>
             <a:r>
-              <a:rPr lang="fr-FR" sz="1600"/>
-              <a:t>HW Flat</a:t>
-            </a:r>
-            <a:endParaRPr lang="fr-CH" sz="1600"/>
+              <a:rPr lang="fr-FR" sz="1600" dirty="0"/>
+              <a:t>HW  </a:t>
+            </a:r>
+            <a:r>
+              <a:rPr lang="fr-FR" sz="1600" dirty="0" err="1"/>
+              <a:t>Ramp</a:t>
+            </a:r>
+            <a:endParaRPr lang="fr-CH" sz="1600" dirty="0" err="1"/>
           </a:p>
         </p:txBody>
       </p:sp>
@@ -6219,14 +6292,14 @@
           <a:noFill/>
         </p:spPr>
         <p:txBody>
-          <a:bodyPr wrap="square" rtlCol="0">
+          <a:bodyPr wrap="square" lIns="91440" tIns="45720" rIns="91440" bIns="45720" rtlCol="0" anchor="t">
             <a:spAutoFit/>
           </a:bodyPr>
           <a:lstStyle/>
           <a:p>
             <a:r>
               <a:rPr lang="fr-FR" sz="1400"/>
-              <a:t>FW flat  </a:t>
+              <a:t>FW Flat  </a:t>
             </a:r>
             <a:endParaRPr lang="fr-CH" sz="1400"/>
           </a:p>
@@ -6812,6 +6885,23 @@
 </file>
 
 <file path=customXml/item1.xml><?xml version="1.0" encoding="utf-8"?>
+<?mso-contentType ?>
+<FormTemplates xmlns="http://schemas.microsoft.com/sharepoint/v3/contenttype/forms">
+  <Display>DocumentLibraryForm</Display>
+  <Edit>DocumentLibraryForm</Edit>
+  <New>DocumentLibraryForm</New>
+</FormTemplates>
+</file>
+
+<file path=customXml/item2.xml><?xml version="1.0" encoding="utf-8"?>
+<p:properties xmlns:p="http://schemas.microsoft.com/office/2006/metadata/properties" xmlns:xsi="http://www.w3.org/2001/XMLSchema-instance" xmlns:pc="http://schemas.microsoft.com/office/infopath/2007/PartnerControls">
+  <documentManagement>
+    <_activity xmlns="40df5fc2-97f5-4726-9891-8a3ad2bb92f4" xsi:nil="true"/>
+  </documentManagement>
+</p:properties>
+</file>
+
+<file path=customXml/item3.xml><?xml version="1.0" encoding="utf-8"?>
 <ct:contentTypeSchema xmlns:ct="http://schemas.microsoft.com/office/2006/metadata/contentType" xmlns:ma="http://schemas.microsoft.com/office/2006/metadata/properties/metaAttributes" ct:_="" ma:_="" ma:contentTypeName="Document" ma:contentTypeID="0x010100D6F85C86C45FE74D888C2008C06E20CA" ma:contentTypeVersion="5" ma:contentTypeDescription="Een nieuw document maken." ma:contentTypeScope="" ma:versionID="459beab9f241ccc6b0e9575ad04df286">
   <xsd:schema xmlns:xsd="http://www.w3.org/2001/XMLSchema" xmlns:xs="http://www.w3.org/2001/XMLSchema" xmlns:p="http://schemas.microsoft.com/office/2006/metadata/properties" xmlns:ns3="40df5fc2-97f5-4726-9891-8a3ad2bb92f4" targetNamespace="http://schemas.microsoft.com/office/2006/metadata/properties" ma:root="true" ma:fieldsID="c5b78d9c8e00d39364ef3344d59b1af4" ns3:_="">
     <xsd:import namespace="40df5fc2-97f5-4726-9891-8a3ad2bb92f4"/>
@@ -6961,37 +7051,10 @@
 </ct:contentTypeSchema>
 </file>
 
-<file path=customXml/item2.xml><?xml version="1.0" encoding="utf-8"?>
-<p:properties xmlns:p="http://schemas.microsoft.com/office/2006/metadata/properties" xmlns:xsi="http://www.w3.org/2001/XMLSchema-instance" xmlns:pc="http://schemas.microsoft.com/office/infopath/2007/PartnerControls">
-  <documentManagement>
-    <_activity xmlns="40df5fc2-97f5-4726-9891-8a3ad2bb92f4" xsi:nil="true"/>
-  </documentManagement>
-</p:properties>
-</file>
-
-<file path=customXml/item3.xml><?xml version="1.0" encoding="utf-8"?>
-<?mso-contentType ?>
-<FormTemplates xmlns="http://schemas.microsoft.com/sharepoint/v3/contenttype/forms">
-  <Display>DocumentLibraryForm</Display>
-  <Edit>DocumentLibraryForm</Edit>
-  <New>DocumentLibraryForm</New>
-</FormTemplates>
-</file>
-
 <file path=customXml/itemProps1.xml><?xml version="1.0" encoding="utf-8"?>
-<ds:datastoreItem xmlns:ds="http://schemas.openxmlformats.org/officeDocument/2006/customXml" ds:itemID="{6189A315-B498-47A4-8058-6B73234E190A}">
+<ds:datastoreItem xmlns:ds="http://schemas.openxmlformats.org/officeDocument/2006/customXml" ds:itemID="{EED23507-2994-4405-8609-3ABBF42C3ACF}">
   <ds:schemaRefs>
-    <ds:schemaRef ds:uri="40df5fc2-97f5-4726-9891-8a3ad2bb92f4"/>
-    <ds:schemaRef ds:uri="http://purl.org/dc/elements/1.1/"/>
-    <ds:schemaRef ds:uri="http://purl.org/dc/terms/"/>
-    <ds:schemaRef ds:uri="http://schemas.microsoft.com/internal/obd"/>
-    <ds:schemaRef ds:uri="http://schemas.microsoft.com/office/2006/documentManagement/types"/>
-    <ds:schemaRef ds:uri="http://schemas.microsoft.com/office/2006/metadata/contentType"/>
-    <ds:schemaRef ds:uri="http://schemas.microsoft.com/office/2006/metadata/properties"/>
-    <ds:schemaRef ds:uri="http://schemas.microsoft.com/office/2006/metadata/properties/metaAttributes"/>
-    <ds:schemaRef ds:uri="http://schemas.microsoft.com/office/infopath/2007/PartnerControls"/>
-    <ds:schemaRef ds:uri="http://schemas.openxmlformats.org/package/2006/metadata/core-properties"/>
-    <ds:schemaRef ds:uri="http://www.w3.org/2001/XMLSchema"/>
+    <ds:schemaRef ds:uri="http://schemas.microsoft.com/sharepoint/v3/contenttype/forms"/>
   </ds:schemaRefs>
 </ds:datastoreItem>
 </file>
@@ -7013,9 +7076,19 @@
 </file>
 
 <file path=customXml/itemProps3.xml><?xml version="1.0" encoding="utf-8"?>
-<ds:datastoreItem xmlns:ds="http://schemas.openxmlformats.org/officeDocument/2006/customXml" ds:itemID="{EED23507-2994-4405-8609-3ABBF42C3ACF}">
+<ds:datastoreItem xmlns:ds="http://schemas.openxmlformats.org/officeDocument/2006/customXml" ds:itemID="{6189A315-B498-47A4-8058-6B73234E190A}">
   <ds:schemaRefs>
-    <ds:schemaRef ds:uri="http://schemas.microsoft.com/sharepoint/v3/contenttype/forms"/>
+    <ds:schemaRef ds:uri="40df5fc2-97f5-4726-9891-8a3ad2bb92f4"/>
+    <ds:schemaRef ds:uri="http://purl.org/dc/elements/1.1/"/>
+    <ds:schemaRef ds:uri="http://purl.org/dc/terms/"/>
+    <ds:schemaRef ds:uri="http://schemas.microsoft.com/internal/obd"/>
+    <ds:schemaRef ds:uri="http://schemas.microsoft.com/office/2006/documentManagement/types"/>
+    <ds:schemaRef ds:uri="http://schemas.microsoft.com/office/2006/metadata/contentType"/>
+    <ds:schemaRef ds:uri="http://schemas.microsoft.com/office/2006/metadata/properties"/>
+    <ds:schemaRef ds:uri="http://schemas.microsoft.com/office/2006/metadata/properties/metaAttributes"/>
+    <ds:schemaRef ds:uri="http://schemas.microsoft.com/office/infopath/2007/PartnerControls"/>
+    <ds:schemaRef ds:uri="http://schemas.openxmlformats.org/package/2006/metadata/core-properties"/>
+    <ds:schemaRef ds:uri="http://www.w3.org/2001/XMLSchema"/>
   </ds:schemaRefs>
 </ds:datastoreItem>
 </file>